--- a/Chapter Two 1447/IT 647 Data Mining and Business Intelligence/Project/Presentation/ECommerce Sales Forecasting.pptx
+++ b/Chapter Two 1447/IT 647 Data Mining and Business Intelligence/Project/Presentation/ECommerce Sales Forecasting.pptx
@@ -2487,6 +2487,18 @@
   <p:clrMapOvr>
     <a:masterClrMapping/>
   </p:clrMapOvr>
+  <mc:AlternateContent xmlns:mc="http://schemas.openxmlformats.org/markup-compatibility/2006">
+    <mc:Choice xmlns:p15="http://schemas.microsoft.com/office/powerpoint/2012/main" Requires="p15">
+      <p:transition xmlns:p14="http://schemas.microsoft.com/office/powerpoint/2010/main" spd="slow" p14:dur="6000">
+        <p15:prstTrans prst="curtains"/>
+      </p:transition>
+    </mc:Choice>
+    <mc:Fallback>
+      <p:transition spd="slow">
+        <p:fade/>
+      </p:transition>
+    </mc:Fallback>
+  </mc:AlternateContent>
 </p:sld>
 </file>
 
@@ -5004,6 +5016,9 @@
   <p:clrMapOvr>
     <a:masterClrMapping/>
   </p:clrMapOvr>
+  <p:transition spd="slow">
+    <p:push dir="u"/>
+  </p:transition>
 </p:sld>
 </file>
 
@@ -5783,6 +5798,9 @@
   <p:clrMapOvr>
     <a:masterClrMapping/>
   </p:clrMapOvr>
+  <p:transition spd="slow">
+    <p:push dir="u"/>
+  </p:transition>
 </p:sld>
 </file>
 
@@ -6628,6 +6646,9 @@
   <p:clrMapOvr>
     <a:masterClrMapping/>
   </p:clrMapOvr>
+  <p:transition spd="slow">
+    <p:push dir="u"/>
+  </p:transition>
 </p:sld>
 </file>
 
@@ -6861,6 +6882,138 @@
   <p:clrMapOvr>
     <a:masterClrMapping/>
   </p:clrMapOvr>
+  <p:transition spd="slow">
+    <p:push dir="u"/>
+  </p:transition>
+  <p:timing>
+    <p:tnLst>
+      <p:par>
+        <p:cTn id="1" dur="indefinite" restart="never" nodeType="tmRoot">
+          <p:childTnLst>
+            <p:seq concurrent="1" nextAc="seek">
+              <p:cTn id="2" dur="indefinite" nodeType="mainSeq">
+                <p:childTnLst>
+                  <p:par>
+                    <p:cTn id="3" fill="hold">
+                      <p:stCondLst>
+                        <p:cond delay="indefinite"/>
+                      </p:stCondLst>
+                      <p:childTnLst>
+                        <p:par>
+                          <p:cTn id="4" fill="hold">
+                            <p:stCondLst>
+                              <p:cond delay="0"/>
+                            </p:stCondLst>
+                            <p:childTnLst>
+                              <p:par>
+                                <p:cTn id="5" presetID="42" presetClass="entr" presetSubtype="0" fill="hold" nodeType="clickEffect">
+                                  <p:stCondLst>
+                                    <p:cond delay="0"/>
+                                  </p:stCondLst>
+                                  <p:childTnLst>
+                                    <p:set>
+                                      <p:cBhvr>
+                                        <p:cTn id="6" dur="1" fill="hold">
+                                          <p:stCondLst>
+                                            <p:cond delay="0"/>
+                                          </p:stCondLst>
+                                        </p:cTn>
+                                        <p:tgtEl>
+                                          <p:spTgt spid="31"/>
+                                        </p:tgtEl>
+                                        <p:attrNameLst>
+                                          <p:attrName>style.visibility</p:attrName>
+                                        </p:attrNameLst>
+                                      </p:cBhvr>
+                                      <p:to>
+                                        <p:strVal val="visible"/>
+                                      </p:to>
+                                    </p:set>
+                                    <p:animEffect transition="in" filter="fade">
+                                      <p:cBhvr>
+                                        <p:cTn id="7" dur="1000"/>
+                                        <p:tgtEl>
+                                          <p:spTgt spid="31"/>
+                                        </p:tgtEl>
+                                      </p:cBhvr>
+                                    </p:animEffect>
+                                    <p:anim calcmode="lin" valueType="num">
+                                      <p:cBhvr>
+                                        <p:cTn id="8" dur="1000" fill="hold"/>
+                                        <p:tgtEl>
+                                          <p:spTgt spid="31"/>
+                                        </p:tgtEl>
+                                        <p:attrNameLst>
+                                          <p:attrName>ppt_x</p:attrName>
+                                        </p:attrNameLst>
+                                      </p:cBhvr>
+                                      <p:tavLst>
+                                        <p:tav tm="0">
+                                          <p:val>
+                                            <p:strVal val="#ppt_x"/>
+                                          </p:val>
+                                        </p:tav>
+                                        <p:tav tm="100000">
+                                          <p:val>
+                                            <p:strVal val="#ppt_x"/>
+                                          </p:val>
+                                        </p:tav>
+                                      </p:tavLst>
+                                    </p:anim>
+                                    <p:anim calcmode="lin" valueType="num">
+                                      <p:cBhvr>
+                                        <p:cTn id="9" dur="1000" fill="hold"/>
+                                        <p:tgtEl>
+                                          <p:spTgt spid="31"/>
+                                        </p:tgtEl>
+                                        <p:attrNameLst>
+                                          <p:attrName>ppt_y</p:attrName>
+                                        </p:attrNameLst>
+                                      </p:cBhvr>
+                                      <p:tavLst>
+                                        <p:tav tm="0">
+                                          <p:val>
+                                            <p:strVal val="#ppt_y+.1"/>
+                                          </p:val>
+                                        </p:tav>
+                                        <p:tav tm="100000">
+                                          <p:val>
+                                            <p:strVal val="#ppt_y"/>
+                                          </p:val>
+                                        </p:tav>
+                                      </p:tavLst>
+                                    </p:anim>
+                                  </p:childTnLst>
+                                </p:cTn>
+                              </p:par>
+                            </p:childTnLst>
+                          </p:cTn>
+                        </p:par>
+                      </p:childTnLst>
+                    </p:cTn>
+                  </p:par>
+                </p:childTnLst>
+              </p:cTn>
+              <p:prevCondLst>
+                <p:cond evt="onPrev" delay="0">
+                  <p:tgtEl>
+                    <p:sldTgt/>
+                  </p:tgtEl>
+                </p:cond>
+              </p:prevCondLst>
+              <p:nextCondLst>
+                <p:cond evt="onNext" delay="0">
+                  <p:tgtEl>
+                    <p:sldTgt/>
+                  </p:tgtEl>
+                </p:cond>
+              </p:nextCondLst>
+            </p:seq>
+          </p:childTnLst>
+        </p:cTn>
+      </p:par>
+    </p:tnLst>
+  </p:timing>
 </p:sld>
 </file>
 
@@ -6897,7 +7050,7 @@
         </p:nvSpPr>
         <p:spPr>
           <a:xfrm>
-            <a:off x="0" y="0"/>
+            <a:off x="0" y="-15368"/>
             <a:ext cx="9144000" cy="777240"/>
           </a:xfrm>
           <a:prstGeom prst="rect">
@@ -7878,6 +8031,9 @@
   <p:clrMapOvr>
     <a:masterClrMapping/>
   </p:clrMapOvr>
+  <p:transition spd="slow">
+    <p:push dir="u"/>
+  </p:transition>
 </p:sld>
 </file>
 
@@ -9001,6 +9157,9 @@
   <p:clrMapOvr>
     <a:masterClrMapping/>
   </p:clrMapOvr>
+  <p:transition spd="slow">
+    <p:push dir="u"/>
+  </p:transition>
 </p:sld>
 </file>
 
@@ -9611,6 +9770,9 @@
   <p:clrMapOvr>
     <a:masterClrMapping/>
   </p:clrMapOvr>
+  <p:transition spd="slow">
+    <p:push dir="u"/>
+  </p:transition>
 </p:sld>
 </file>
 
@@ -10367,6 +10529,9 @@
   <p:clrMapOvr>
     <a:masterClrMapping/>
   </p:clrMapOvr>
+  <p:transition spd="slow">
+    <p:push dir="u"/>
+  </p:transition>
 </p:sld>
 </file>
 
@@ -11456,6 +11621,9 @@
   <p:clrMapOvr>
     <a:masterClrMapping/>
   </p:clrMapOvr>
+  <p:transition spd="slow">
+    <p:push dir="u"/>
+  </p:transition>
 </p:sld>
 </file>
 
@@ -12652,6 +12820,9 @@
   <p:clrMapOvr>
     <a:masterClrMapping/>
   </p:clrMapOvr>
+  <p:transition spd="slow">
+    <p:push dir="u"/>
+  </p:transition>
 </p:sld>
 </file>
 
@@ -13744,6 +13915,9 @@
   <p:clrMapOvr>
     <a:masterClrMapping/>
   </p:clrMapOvr>
+  <p:transition spd="slow">
+    <p:push dir="u"/>
+  </p:transition>
 </p:sld>
 </file>
 
@@ -15070,6 +15244,9 @@
   <p:clrMapOvr>
     <a:masterClrMapping/>
   </p:clrMapOvr>
+  <p:transition spd="slow">
+    <p:push dir="u"/>
+  </p:transition>
 </p:sld>
 </file>
 
